--- a/reproducibility/assets/SIQR模型示意图_复现修正版.pptx
+++ b/reproducibility/assets/SIQR模型示意图_复现修正版.pptx
@@ -1802,25 +1802,25 @@
           <p:nvPr>
             <p:extLst>
               <p:ext uri="{D42A27DB-BD31-4B8C-83A1-F6EECF244321}">
-                <p14:modId xmlns:p14="http://schemas.microsoft.com/office/powerpoint/2010/main" val="343496114"/>
+                <p14:modId xmlns:p14="http://schemas.microsoft.com/office/powerpoint/2010/main" val="3789651055"/>
               </p:ext>
             </p:extLst>
           </p:nvPr>
         </p:nvGraphicFramePr>
         <p:xfrm>
-          <a:off x="2670995" y="560387"/>
-          <a:ext cx="1687460" cy="444501"/>
+          <a:off x="2500313" y="554038"/>
+          <a:ext cx="2028825" cy="458787"/>
         </p:xfrm>
         <a:graphic>
           <a:graphicData uri="http://schemas.openxmlformats.org/presentationml/2006/ole">
             <mc:AlternateContent xmlns:mc="http://schemas.openxmlformats.org/markup-compatibility/2006">
               <mc:Choice xmlns:v="urn:schemas-microsoft-com:vml" Requires="v">
-                <p:oleObj name="AxMath" r:id="rId13" imgW="975960" imgH="257040" progId="Equation.AxMath">
+                <p:oleObj name="AxMath" r:id="rId13" imgW="1174320" imgH="265680" progId="Equation.AxMath">
                   <p:embed/>
                 </p:oleObj>
               </mc:Choice>
               <mc:Fallback>
-                <p:oleObj name="AxMath" r:id="rId13" imgW="975960" imgH="257040" progId="Equation.AxMath">
+                <p:oleObj name="AxMath" r:id="rId13" imgW="1174320" imgH="265680" progId="Equation.AxMath">
                   <p:embed/>
                   <p:pic>
                     <p:nvPicPr>
@@ -1836,8 +1836,8 @@
                     </p:blipFill>
                     <p:spPr>
                       <a:xfrm>
-                        <a:off x="2670995" y="560387"/>
-                        <a:ext cx="1687460" cy="444501"/>
+                        <a:off x="2500313" y="554038"/>
+                        <a:ext cx="2028825" cy="458787"/>
                       </a:xfrm>
                       <a:prstGeom prst="rect">
                         <a:avLst/>
